--- a/docs/제품설명서_202060615.pptx
+++ b/docs/제품설명서_202060615.pptx
@@ -2350,7 +2350,7 @@
                 <a:ea typeface="Malgun Gothic" pitchFamily="34" charset="-122"/>
                 <a:cs typeface="Malgun Gothic" pitchFamily="34" charset="-120"/>
               </a:rPr>
-              <a:t>제품소개서 · 2026.06.15</a:t>
+              <a:t>제품소개서 · 2026.06.21</a:t>
             </a:r>
             <a:endParaRPr lang="en-US" sz="1300" dirty="0"/>
           </a:p>
@@ -2526,7 +2526,7 @@
                 <a:ea typeface="Malgun Gothic" pitchFamily="34" charset="-122"/>
                 <a:cs typeface="Malgun Gothic" pitchFamily="34" charset="-120"/>
               </a:rPr>
-              <a:t>17</a:t>
+              <a:t>19</a:t>
             </a:r>
             <a:endParaRPr lang="en-US" sz="5400" dirty="0"/>
           </a:p>
